--- a/08-Kubernetes/session10/08-10-Helm-Package-Manager.pptx
+++ b/08-Kubernetes/session10/08-10-Helm-Package-Manager.pptx
@@ -2012,9 +2012,6 @@
             </a:pPr>
             <a:r>
               <a:rPr lang="en-US" sz="1000" dirty="0">
-                <a:solidFill>
-                  <a:srgbClr val="00D4AA"/>
-                </a:solidFill>
                 <a:latin typeface="Consolas" pitchFamily="34" charset="0"/>
                 <a:ea typeface="Consolas" pitchFamily="34" charset="-122"/>
                 <a:cs typeface="Consolas" pitchFamily="34" charset="-120"/>
@@ -2029,9 +2026,6 @@
             </a:pPr>
             <a:r>
               <a:rPr lang="en-US" sz="1000" dirty="0">
-                <a:solidFill>
-                  <a:srgbClr val="00D4AA"/>
-                </a:solidFill>
                 <a:latin typeface="Consolas" pitchFamily="34" charset="0"/>
                 <a:ea typeface="Consolas" pitchFamily="34" charset="-122"/>
                 <a:cs typeface="Consolas" pitchFamily="34" charset="-120"/>
@@ -2046,9 +2040,6 @@
             </a:pPr>
             <a:r>
               <a:rPr lang="en-US" sz="1000" dirty="0">
-                <a:solidFill>
-                  <a:srgbClr val="00D4AA"/>
-                </a:solidFill>
                 <a:latin typeface="Consolas" pitchFamily="34" charset="0"/>
                 <a:ea typeface="Consolas" pitchFamily="34" charset="-122"/>
                 <a:cs typeface="Consolas" pitchFamily="34" charset="-120"/>
@@ -2151,9 +2142,6 @@
             </a:pPr>
             <a:r>
               <a:rPr lang="en-US" sz="1000" dirty="0">
-                <a:solidFill>
-                  <a:srgbClr val="00D4AA"/>
-                </a:solidFill>
                 <a:latin typeface="Consolas" pitchFamily="34" charset="0"/>
                 <a:ea typeface="Consolas" pitchFamily="34" charset="-122"/>
                 <a:cs typeface="Consolas" pitchFamily="34" charset="-120"/>
@@ -2168,9 +2156,6 @@
             </a:pPr>
             <a:r>
               <a:rPr lang="en-US" sz="1000" dirty="0">
-                <a:solidFill>
-                  <a:srgbClr val="00D4AA"/>
-                </a:solidFill>
                 <a:latin typeface="Consolas" pitchFamily="34" charset="0"/>
                 <a:ea typeface="Consolas" pitchFamily="34" charset="-122"/>
                 <a:cs typeface="Consolas" pitchFamily="34" charset="-120"/>
@@ -2185,9 +2170,6 @@
             </a:pPr>
             <a:r>
               <a:rPr lang="en-US" sz="1000" dirty="0">
-                <a:solidFill>
-                  <a:srgbClr val="00D4AA"/>
-                </a:solidFill>
                 <a:latin typeface="Consolas" pitchFamily="34" charset="0"/>
                 <a:ea typeface="Consolas" pitchFamily="34" charset="-122"/>
                 <a:cs typeface="Consolas" pitchFamily="34" charset="-120"/>
@@ -2290,9 +2272,6 @@
             </a:pPr>
             <a:r>
               <a:rPr lang="en-US" sz="1000" dirty="0">
-                <a:solidFill>
-                  <a:srgbClr val="00D4AA"/>
-                </a:solidFill>
                 <a:latin typeface="Consolas" pitchFamily="34" charset="0"/>
                 <a:ea typeface="Consolas" pitchFamily="34" charset="-122"/>
                 <a:cs typeface="Consolas" pitchFamily="34" charset="-120"/>
@@ -2307,9 +2286,6 @@
             </a:pPr>
             <a:r>
               <a:rPr lang="en-US" sz="1000" dirty="0">
-                <a:solidFill>
-                  <a:srgbClr val="00D4AA"/>
-                </a:solidFill>
                 <a:latin typeface="Consolas" pitchFamily="34" charset="0"/>
                 <a:ea typeface="Consolas" pitchFamily="34" charset="-122"/>
                 <a:cs typeface="Consolas" pitchFamily="34" charset="-120"/>
@@ -2324,9 +2300,6 @@
             </a:pPr>
             <a:r>
               <a:rPr lang="en-US" sz="1000" dirty="0">
-                <a:solidFill>
-                  <a:srgbClr val="00D4AA"/>
-                </a:solidFill>
                 <a:latin typeface="Consolas" pitchFamily="34" charset="0"/>
                 <a:ea typeface="Consolas" pitchFamily="34" charset="-122"/>
                 <a:cs typeface="Consolas" pitchFamily="34" charset="-120"/>
@@ -2429,9 +2402,6 @@
             </a:pPr>
             <a:r>
               <a:rPr lang="en-US" sz="1000" dirty="0">
-                <a:solidFill>
-                  <a:srgbClr val="00D4AA"/>
-                </a:solidFill>
                 <a:latin typeface="Consolas" pitchFamily="34" charset="0"/>
                 <a:ea typeface="Consolas" pitchFamily="34" charset="-122"/>
                 <a:cs typeface="Consolas" pitchFamily="34" charset="-120"/>
@@ -2446,9 +2416,6 @@
             </a:pPr>
             <a:r>
               <a:rPr lang="en-US" sz="1000" dirty="0">
-                <a:solidFill>
-                  <a:srgbClr val="00D4AA"/>
-                </a:solidFill>
                 <a:latin typeface="Consolas" pitchFamily="34" charset="0"/>
                 <a:ea typeface="Consolas" pitchFamily="34" charset="-122"/>
                 <a:cs typeface="Consolas" pitchFamily="34" charset="-120"/>
@@ -2463,9 +2430,6 @@
             </a:pPr>
             <a:r>
               <a:rPr lang="en-US" sz="1000" dirty="0">
-                <a:solidFill>
-                  <a:srgbClr val="00D4AA"/>
-                </a:solidFill>
                 <a:latin typeface="Consolas" pitchFamily="34" charset="0"/>
                 <a:ea typeface="Consolas" pitchFamily="34" charset="-122"/>
                 <a:cs typeface="Consolas" pitchFamily="34" charset="-120"/>
@@ -2568,9 +2532,6 @@
             </a:pPr>
             <a:r>
               <a:rPr lang="en-US" sz="1000" dirty="0">
-                <a:solidFill>
-                  <a:srgbClr val="00D4AA"/>
-                </a:solidFill>
                 <a:latin typeface="Consolas" pitchFamily="34" charset="0"/>
                 <a:ea typeface="Consolas" pitchFamily="34" charset="-122"/>
                 <a:cs typeface="Consolas" pitchFamily="34" charset="-120"/>
@@ -2585,9 +2546,6 @@
             </a:pPr>
             <a:r>
               <a:rPr lang="en-US" sz="1000" dirty="0">
-                <a:solidFill>
-                  <a:srgbClr val="00D4AA"/>
-                </a:solidFill>
                 <a:latin typeface="Consolas" pitchFamily="34" charset="0"/>
                 <a:ea typeface="Consolas" pitchFamily="34" charset="-122"/>
                 <a:cs typeface="Consolas" pitchFamily="34" charset="-120"/>
@@ -2602,9 +2560,6 @@
             </a:pPr>
             <a:r>
               <a:rPr lang="en-US" sz="1000" dirty="0">
-                <a:solidFill>
-                  <a:srgbClr val="00D4AA"/>
-                </a:solidFill>
                 <a:latin typeface="Consolas" pitchFamily="34" charset="0"/>
                 <a:ea typeface="Consolas" pitchFamily="34" charset="-122"/>
                 <a:cs typeface="Consolas" pitchFamily="34" charset="-120"/>
@@ -2707,9 +2662,6 @@
             </a:pPr>
             <a:r>
               <a:rPr lang="en-US" sz="1000" dirty="0">
-                <a:solidFill>
-                  <a:srgbClr val="00D4AA"/>
-                </a:solidFill>
                 <a:latin typeface="Consolas" pitchFamily="34" charset="0"/>
                 <a:ea typeface="Consolas" pitchFamily="34" charset="-122"/>
                 <a:cs typeface="Consolas" pitchFamily="34" charset="-120"/>
@@ -2724,9 +2676,6 @@
             </a:pPr>
             <a:r>
               <a:rPr lang="en-US" sz="1000" dirty="0">
-                <a:solidFill>
-                  <a:srgbClr val="00D4AA"/>
-                </a:solidFill>
                 <a:latin typeface="Consolas" pitchFamily="34" charset="0"/>
                 <a:ea typeface="Consolas" pitchFamily="34" charset="-122"/>
                 <a:cs typeface="Consolas" pitchFamily="34" charset="-120"/>
@@ -2741,9 +2690,6 @@
             </a:pPr>
             <a:r>
               <a:rPr lang="en-US" sz="1000" dirty="0">
-                <a:solidFill>
-                  <a:srgbClr val="00D4AA"/>
-                </a:solidFill>
                 <a:latin typeface="Consolas" pitchFamily="34" charset="0"/>
                 <a:ea typeface="Consolas" pitchFamily="34" charset="-122"/>
                 <a:cs typeface="Consolas" pitchFamily="34" charset="-120"/>
@@ -6321,7 +6267,7 @@
                 <a:ea typeface="Arial" pitchFamily="34" charset="-122"/>
                 <a:cs typeface="Arial" pitchFamily="34" charset="-120"/>
               </a:rPr>
-              <a:t>Hard-coded values in each YAML make sharing charts across teams difficult</a:t>
+              <a:t>Hard-coded values in each YAML make sharing manifests across teams difficult</a:t>
             </a:r>
             <a:endParaRPr lang="en-US" sz="1100" dirty="0"/>
           </a:p>
@@ -9523,8 +9469,8 @@
         </p:nvSpPr>
         <p:spPr>
           <a:xfrm>
-            <a:off x="457200" y="1097280"/>
-            <a:ext cx="4114800" cy="384048"/>
+            <a:off x="251460" y="1097280"/>
+            <a:ext cx="4526280" cy="384048"/>
           </a:xfrm>
           <a:prstGeom prst="rect">
             <a:avLst/>
@@ -9550,8 +9496,8 @@
         </p:nvSpPr>
         <p:spPr>
           <a:xfrm>
-            <a:off x="548640" y="1097280"/>
-            <a:ext cx="3931920" cy="384048"/>
+            <a:off x="352044" y="1097280"/>
+            <a:ext cx="4325112" cy="384048"/>
           </a:xfrm>
           <a:prstGeom prst="rect">
             <a:avLst/>
@@ -9575,7 +9521,7 @@
                 <a:ea typeface="Consolas" pitchFamily="34" charset="-122"/>
                 <a:cs typeface="Consolas" pitchFamily="34" charset="-120"/>
               </a:rPr>
-              <a:t>helm install myapp ./chart -f values-dev.yaml</a:t>
+              <a:t>helm upgrade --install myapp ./chart -f values-dev.yaml</a:t>
             </a:r>
             <a:endParaRPr lang="en-US" sz="1100" dirty="0"/>
           </a:p>
@@ -9589,7 +9535,7 @@
         </p:nvSpPr>
         <p:spPr>
           <a:xfrm>
-            <a:off x="4754880" y="1097280"/>
+            <a:off x="5052060" y="1097280"/>
             <a:ext cx="3931920" cy="384048"/>
           </a:xfrm>
           <a:prstGeom prst="rect">
@@ -9628,8 +9574,8 @@
         </p:nvSpPr>
         <p:spPr>
           <a:xfrm>
-            <a:off x="457200" y="1536192"/>
-            <a:ext cx="4114800" cy="384048"/>
+            <a:off x="251460" y="1536192"/>
+            <a:ext cx="4526280" cy="384048"/>
           </a:xfrm>
           <a:prstGeom prst="rect">
             <a:avLst/>
@@ -9655,8 +9601,8 @@
         </p:nvSpPr>
         <p:spPr>
           <a:xfrm>
-            <a:off x="548640" y="1536192"/>
-            <a:ext cx="3931920" cy="384048"/>
+            <a:off x="352044" y="1536192"/>
+            <a:ext cx="4325112" cy="384048"/>
           </a:xfrm>
           <a:prstGeom prst="rect">
             <a:avLst/>
@@ -9668,9 +9614,6 @@
           <a:bodyPr wrap="square" lIns="0" tIns="0" rIns="0" bIns="0" rtlCol="0" anchor="ctr"/>
           <a:lstStyle/>
           <a:p>
-            <a:pPr marL="0" indent="0">
-              <a:buNone/>
-            </a:pPr>
             <a:r>
               <a:rPr lang="en-US" sz="1100" dirty="0">
                 <a:solidFill>
@@ -9680,7 +9623,7 @@
                 <a:ea typeface="Consolas" pitchFamily="34" charset="-122"/>
                 <a:cs typeface="Consolas" pitchFamily="34" charset="-120"/>
               </a:rPr>
-              <a:t>helm install myapp ./chart -f values-prod.yaml</a:t>
+              <a:t>helm upgrade --install myapp ./chart -f values-prod.yaml</a:t>
             </a:r>
             <a:endParaRPr lang="en-US" sz="1100" dirty="0"/>
           </a:p>
@@ -9694,7 +9637,7 @@
         </p:nvSpPr>
         <p:spPr>
           <a:xfrm>
-            <a:off x="4754880" y="1536192"/>
+            <a:off x="5052060" y="1536192"/>
             <a:ext cx="3931920" cy="384048"/>
           </a:xfrm>
           <a:prstGeom prst="rect">
@@ -9733,8 +9676,8 @@
         </p:nvSpPr>
         <p:spPr>
           <a:xfrm>
-            <a:off x="457200" y="1975104"/>
-            <a:ext cx="4114800" cy="384048"/>
+            <a:off x="251460" y="1975104"/>
+            <a:ext cx="4526280" cy="384048"/>
           </a:xfrm>
           <a:prstGeom prst="rect">
             <a:avLst/>
@@ -9760,8 +9703,8 @@
         </p:nvSpPr>
         <p:spPr>
           <a:xfrm>
-            <a:off x="548640" y="1975104"/>
-            <a:ext cx="3931920" cy="384048"/>
+            <a:off x="352044" y="1975104"/>
+            <a:ext cx="4325112" cy="384048"/>
           </a:xfrm>
           <a:prstGeom prst="rect">
             <a:avLst/>
@@ -9773,9 +9716,6 @@
           <a:bodyPr wrap="square" lIns="0" tIns="0" rIns="0" bIns="0" rtlCol="0" anchor="ctr"/>
           <a:lstStyle/>
           <a:p>
-            <a:pPr marL="0" indent="0">
-              <a:buNone/>
-            </a:pPr>
             <a:r>
               <a:rPr lang="en-US" sz="1100" dirty="0">
                 <a:solidFill>
@@ -9785,7 +9725,7 @@
                 <a:ea typeface="Consolas" pitchFamily="34" charset="-122"/>
                 <a:cs typeface="Consolas" pitchFamily="34" charset="-120"/>
               </a:rPr>
-              <a:t>helm install myapp ./chart -f values.yaml -f overrides.yaml</a:t>
+              <a:t>helm upgrade --install myapp ./chart -f values.yaml -f overrides.yaml</a:t>
             </a:r>
             <a:endParaRPr lang="en-US" sz="1100" dirty="0"/>
           </a:p>
@@ -9799,7 +9739,7 @@
         </p:nvSpPr>
         <p:spPr>
           <a:xfrm>
-            <a:off x="4754880" y="1975104"/>
+            <a:off x="5052060" y="1975104"/>
             <a:ext cx="3931920" cy="384048"/>
           </a:xfrm>
           <a:prstGeom prst="rect">
@@ -9838,8 +9778,8 @@
         </p:nvSpPr>
         <p:spPr>
           <a:xfrm>
-            <a:off x="457200" y="2414016"/>
-            <a:ext cx="4114800" cy="384048"/>
+            <a:off x="251460" y="2414016"/>
+            <a:ext cx="4526280" cy="384048"/>
           </a:xfrm>
           <a:prstGeom prst="rect">
             <a:avLst/>
@@ -9865,8 +9805,8 @@
         </p:nvSpPr>
         <p:spPr>
           <a:xfrm>
-            <a:off x="548640" y="2414016"/>
-            <a:ext cx="3931920" cy="384048"/>
+            <a:off x="352044" y="2414016"/>
+            <a:ext cx="4325112" cy="384048"/>
           </a:xfrm>
           <a:prstGeom prst="rect">
             <a:avLst/>
@@ -9878,9 +9818,6 @@
           <a:bodyPr wrap="square" lIns="0" tIns="0" rIns="0" bIns="0" rtlCol="0" anchor="ctr"/>
           <a:lstStyle/>
           <a:p>
-            <a:pPr marL="0" indent="0">
-              <a:buNone/>
-            </a:pPr>
             <a:r>
               <a:rPr lang="en-US" sz="1100" dirty="0">
                 <a:solidFill>
@@ -9890,7 +9827,7 @@
                 <a:ea typeface="Consolas" pitchFamily="34" charset="-122"/>
                 <a:cs typeface="Consolas" pitchFamily="34" charset="-120"/>
               </a:rPr>
-              <a:t>helm install myapp ./chart --set replicaCount=5</a:t>
+              <a:t>helm upgrade --install myapp ./chart --set replicaCount=5</a:t>
             </a:r>
             <a:endParaRPr lang="en-US" sz="1100" dirty="0"/>
           </a:p>
@@ -9904,7 +9841,7 @@
         </p:nvSpPr>
         <p:spPr>
           <a:xfrm>
-            <a:off x="4754880" y="2414016"/>
+            <a:off x="5052060" y="2414016"/>
             <a:ext cx="3931920" cy="384048"/>
           </a:xfrm>
           <a:prstGeom prst="rect">
@@ -9943,8 +9880,8 @@
         </p:nvSpPr>
         <p:spPr>
           <a:xfrm>
-            <a:off x="457200" y="2852928"/>
-            <a:ext cx="4114800" cy="384048"/>
+            <a:off x="251460" y="2852928"/>
+            <a:ext cx="4526280" cy="384048"/>
           </a:xfrm>
           <a:prstGeom prst="rect">
             <a:avLst/>
@@ -9970,8 +9907,8 @@
         </p:nvSpPr>
         <p:spPr>
           <a:xfrm>
-            <a:off x="548640" y="2852928"/>
-            <a:ext cx="3931920" cy="384048"/>
+            <a:off x="352044" y="2852928"/>
+            <a:ext cx="4325112" cy="384048"/>
           </a:xfrm>
           <a:prstGeom prst="rect">
             <a:avLst/>
@@ -9983,9 +9920,6 @@
           <a:bodyPr wrap="square" lIns="0" tIns="0" rIns="0" bIns="0" rtlCol="0" anchor="ctr"/>
           <a:lstStyle/>
           <a:p>
-            <a:pPr marL="0" indent="0">
-              <a:buNone/>
-            </a:pPr>
             <a:r>
               <a:rPr lang="en-US" sz="1100" dirty="0">
                 <a:solidFill>
@@ -9995,7 +9929,7 @@
                 <a:ea typeface="Consolas" pitchFamily="34" charset="-122"/>
                 <a:cs typeface="Consolas" pitchFamily="34" charset="-120"/>
               </a:rPr>
-              <a:t>helm install myapp ./chart -n prod-namespace</a:t>
+              <a:t>helm upgrade --install myapp ./chart -n prod-namespace</a:t>
             </a:r>
             <a:endParaRPr lang="en-US" sz="1100" dirty="0"/>
           </a:p>
@@ -10009,7 +9943,7 @@
         </p:nvSpPr>
         <p:spPr>
           <a:xfrm>
-            <a:off x="4754880" y="2852928"/>
+            <a:off x="5052060" y="2852928"/>
             <a:ext cx="3931920" cy="384048"/>
           </a:xfrm>
           <a:prstGeom prst="rect">
@@ -10048,8 +9982,8 @@
         </p:nvSpPr>
         <p:spPr>
           <a:xfrm>
-            <a:off x="457200" y="3291840"/>
-            <a:ext cx="4114800" cy="384048"/>
+            <a:off x="251460" y="3291840"/>
+            <a:ext cx="4526280" cy="384048"/>
           </a:xfrm>
           <a:prstGeom prst="rect">
             <a:avLst/>
@@ -10075,8 +10009,8 @@
         </p:nvSpPr>
         <p:spPr>
           <a:xfrm>
-            <a:off x="548640" y="3291840"/>
-            <a:ext cx="3931920" cy="384048"/>
+            <a:off x="352044" y="3291840"/>
+            <a:ext cx="4325112" cy="384048"/>
           </a:xfrm>
           <a:prstGeom prst="rect">
             <a:avLst/>
@@ -10088,9 +10022,6 @@
           <a:bodyPr wrap="square" lIns="0" tIns="0" rIns="0" bIns="0" rtlCol="0" anchor="ctr"/>
           <a:lstStyle/>
           <a:p>
-            <a:pPr marL="0" indent="0">
-              <a:buNone/>
-            </a:pPr>
             <a:r>
               <a:rPr lang="en-US" sz="1100" dirty="0">
                 <a:solidFill>
@@ -10100,7 +10031,7 @@
                 <a:ea typeface="Consolas" pitchFamily="34" charset="-122"/>
                 <a:cs typeface="Consolas" pitchFamily="34" charset="-120"/>
               </a:rPr>
-              <a:t>helm install myapp ./chart --dry-run --debug</a:t>
+              <a:t>helm upgrade --install myapp ./chart --dry-run --debug</a:t>
             </a:r>
             <a:endParaRPr lang="en-US" sz="1100" dirty="0"/>
           </a:p>
@@ -10114,7 +10045,7 @@
         </p:nvSpPr>
         <p:spPr>
           <a:xfrm>
-            <a:off x="4754880" y="3291840"/>
+            <a:off x="5052060" y="3291840"/>
             <a:ext cx="3931920" cy="384048"/>
           </a:xfrm>
           <a:prstGeom prst="rect">
